--- a/docs/figs/cover.pptx
+++ b/docs/figs/cover.pptx
@@ -243,7 +243,7 @@
           <a:p>
             <a:fld id="{81F69B07-149C-480A-A890-BD4AE7787C02}" type="datetimeFigureOut">
               <a:rPr lang="en-NL" smtClean="0"/>
-              <a:t>29/08/2025</a:t>
+              <a:t>31/08/2025</a:t>
             </a:fld>
             <a:endParaRPr lang="en-NL"/>
           </a:p>
@@ -413,7 +413,7 @@
           <a:p>
             <a:fld id="{81F69B07-149C-480A-A890-BD4AE7787C02}" type="datetimeFigureOut">
               <a:rPr lang="en-NL" smtClean="0"/>
-              <a:t>29/08/2025</a:t>
+              <a:t>31/08/2025</a:t>
             </a:fld>
             <a:endParaRPr lang="en-NL"/>
           </a:p>
@@ -593,7 +593,7 @@
           <a:p>
             <a:fld id="{81F69B07-149C-480A-A890-BD4AE7787C02}" type="datetimeFigureOut">
               <a:rPr lang="en-NL" smtClean="0"/>
-              <a:t>29/08/2025</a:t>
+              <a:t>31/08/2025</a:t>
             </a:fld>
             <a:endParaRPr lang="en-NL"/>
           </a:p>
@@ -763,7 +763,7 @@
           <a:p>
             <a:fld id="{81F69B07-149C-480A-A890-BD4AE7787C02}" type="datetimeFigureOut">
               <a:rPr lang="en-NL" smtClean="0"/>
-              <a:t>29/08/2025</a:t>
+              <a:t>31/08/2025</a:t>
             </a:fld>
             <a:endParaRPr lang="en-NL"/>
           </a:p>
@@ -1009,7 +1009,7 @@
           <a:p>
             <a:fld id="{81F69B07-149C-480A-A890-BD4AE7787C02}" type="datetimeFigureOut">
               <a:rPr lang="en-NL" smtClean="0"/>
-              <a:t>29/08/2025</a:t>
+              <a:t>31/08/2025</a:t>
             </a:fld>
             <a:endParaRPr lang="en-NL"/>
           </a:p>
@@ -1241,7 +1241,7 @@
           <a:p>
             <a:fld id="{81F69B07-149C-480A-A890-BD4AE7787C02}" type="datetimeFigureOut">
               <a:rPr lang="en-NL" smtClean="0"/>
-              <a:t>29/08/2025</a:t>
+              <a:t>31/08/2025</a:t>
             </a:fld>
             <a:endParaRPr lang="en-NL"/>
           </a:p>
@@ -1608,7 +1608,7 @@
           <a:p>
             <a:fld id="{81F69B07-149C-480A-A890-BD4AE7787C02}" type="datetimeFigureOut">
               <a:rPr lang="en-NL" smtClean="0"/>
-              <a:t>29/08/2025</a:t>
+              <a:t>31/08/2025</a:t>
             </a:fld>
             <a:endParaRPr lang="en-NL"/>
           </a:p>
@@ -1726,7 +1726,7 @@
           <a:p>
             <a:fld id="{81F69B07-149C-480A-A890-BD4AE7787C02}" type="datetimeFigureOut">
               <a:rPr lang="en-NL" smtClean="0"/>
-              <a:t>29/08/2025</a:t>
+              <a:t>31/08/2025</a:t>
             </a:fld>
             <a:endParaRPr lang="en-NL"/>
           </a:p>
@@ -1821,7 +1821,7 @@
           <a:p>
             <a:fld id="{81F69B07-149C-480A-A890-BD4AE7787C02}" type="datetimeFigureOut">
               <a:rPr lang="en-NL" smtClean="0"/>
-              <a:t>29/08/2025</a:t>
+              <a:t>31/08/2025</a:t>
             </a:fld>
             <a:endParaRPr lang="en-NL"/>
           </a:p>
@@ -2098,7 +2098,7 @@
           <a:p>
             <a:fld id="{81F69B07-149C-480A-A890-BD4AE7787C02}" type="datetimeFigureOut">
               <a:rPr lang="en-NL" smtClean="0"/>
-              <a:t>29/08/2025</a:t>
+              <a:t>31/08/2025</a:t>
             </a:fld>
             <a:endParaRPr lang="en-NL"/>
           </a:p>
@@ -2355,7 +2355,7 @@
           <a:p>
             <a:fld id="{81F69B07-149C-480A-A890-BD4AE7787C02}" type="datetimeFigureOut">
               <a:rPr lang="en-NL" smtClean="0"/>
-              <a:t>29/08/2025</a:t>
+              <a:t>31/08/2025</a:t>
             </a:fld>
             <a:endParaRPr lang="en-NL"/>
           </a:p>
@@ -2568,7 +2568,7 @@
           <a:p>
             <a:fld id="{81F69B07-149C-480A-A890-BD4AE7787C02}" type="datetimeFigureOut">
               <a:rPr lang="en-NL" smtClean="0"/>
-              <a:t>29/08/2025</a:t>
+              <a:t>31/08/2025</a:t>
             </a:fld>
             <a:endParaRPr lang="en-NL"/>
           </a:p>
@@ -3476,7 +3476,26 @@
                 <a:latin typeface="Aharoni" panose="02010803020104030203" pitchFamily="2" charset="-79"/>
                 <a:cs typeface="Aharoni" panose="02010803020104030203" pitchFamily="2" charset="-79"/>
               </a:rPr>
-              <a:t>Detecting Peaks and Valleys: Learn The Essentials for Accurate Analysis.</a:t>
+              <a:t>Detecting Peaks and Valleys: </a:t>
+            </a:r>
+          </a:p>
+          <a:p>
+            <a:r>
+              <a:rPr lang="en-US" sz="2200" dirty="0">
+                <a:solidFill>
+                  <a:schemeClr val="bg1"/>
+                </a:solidFill>
+                <a:effectLst>
+                  <a:outerShdw blurRad="38100" dist="38100" dir="2700000" algn="tl">
+                    <a:srgbClr val="000000">
+                      <a:alpha val="43137"/>
+                    </a:srgbClr>
+                  </a:outerShdw>
+                </a:effectLst>
+                <a:latin typeface="Aharoni" panose="02010803020104030203" pitchFamily="2" charset="-79"/>
+                <a:cs typeface="Aharoni" panose="02010803020104030203" pitchFamily="2" charset="-79"/>
+              </a:rPr>
+              <a:t>The Essentials for Accurate Analysis.</a:t>
             </a:r>
           </a:p>
         </p:txBody>
